--- a/back/test_output/test_doc.pptx
+++ b/back/test_output/test_doc.pptx
@@ -3331,7 +3331,7 @@
         <p:spPr>
           <a:xfrm>
             <a:off x="9445752" y="365760"/>
-            <a:ext cx="1499937" cy="320040"/>
+            <a:ext cx="319535" cy="320040"/>
           </a:xfrm>
           <a:prstGeom prst="rect">
             <a:avLst/>
@@ -3945,7 +3945,7 @@
         <p:spPr>
           <a:xfrm>
             <a:off x="9445752" y="365760"/>
-            <a:ext cx="1499937" cy="320040"/>
+            <a:ext cx="319535" cy="320040"/>
           </a:xfrm>
           <a:prstGeom prst="rect">
             <a:avLst/>
@@ -5360,7 +5360,7 @@
         <p:spPr>
           <a:xfrm>
             <a:off x="9445752" y="365760"/>
-            <a:ext cx="1499937" cy="320040"/>
+            <a:ext cx="319535" cy="320040"/>
           </a:xfrm>
           <a:prstGeom prst="rect">
             <a:avLst/>
@@ -5384,7 +5384,7 @@
         <p:spPr>
           <a:xfrm>
             <a:off x="4261104" y="2286000"/>
-            <a:ext cx="3657600" cy="780418"/>
+            <a:ext cx="3657600" cy="3663378"/>
           </a:xfrm>
           <a:prstGeom prst="rect">
             <a:avLst/>
